--- a/bookreading/bookreading.pptx
+++ b/bookreading/bookreading.pptx
@@ -5,7 +5,7 @@
     <p:sldMasterId id="2147483663" r:id="rId1"/>
   </p:sldMasterIdLst>
   <p:notesMasterIdLst>
-    <p:notesMasterId r:id="rId15"/>
+    <p:notesMasterId r:id="rId16"/>
   </p:notesMasterIdLst>
   <p:sldIdLst>
     <p:sldId id="256" r:id="rId2"/>
@@ -20,7 +20,8 @@
     <p:sldId id="318" r:id="rId11"/>
     <p:sldId id="320" r:id="rId12"/>
     <p:sldId id="321" r:id="rId13"/>
-    <p:sldId id="319" r:id="rId14"/>
+    <p:sldId id="323" r:id="rId14"/>
+    <p:sldId id="319" r:id="rId15"/>
   </p:sldIdLst>
   <p:sldSz cx="9144000" cy="6858000" type="screen4x3"/>
   <p:notesSz cx="6858000" cy="9144000"/>
@@ -219,7 +220,7 @@
           </a:lstStyle>
           <a:p>
             <a:fld id="{6B8D1B20-A248-FB47-8240-73C0C5F47C9D}" type="datetimeFigureOut">
-              <a:t>2025/3/27</a:t>
+              <a:t>2026/5/1</a:t>
             </a:fld>
             <a:endParaRPr kumimoji="1" lang="ja-JP" altLang="en-US"/>
           </a:p>
@@ -2153,6 +2154,428 @@
 </file>
 
 <file path=ppt/slides/slide13.xml><?xml version="1.0" encoding="utf-8"?>
+<p:sld xmlns:a="http://schemas.openxmlformats.org/drawingml/2006/main" xmlns:r="http://schemas.openxmlformats.org/officeDocument/2006/relationships" xmlns:p="http://schemas.openxmlformats.org/presentationml/2006/main">
+  <p:cSld>
+    <p:spTree>
+      <p:nvGrpSpPr>
+        <p:cNvPr id="1" name=""/>
+        <p:cNvGrpSpPr/>
+        <p:nvPr/>
+      </p:nvGrpSpPr>
+      <p:grpSpPr>
+        <a:xfrm>
+          <a:off x="0" y="0"/>
+          <a:ext cx="0" cy="0"/>
+          <a:chOff x="0" y="0"/>
+          <a:chExt cx="0" cy="0"/>
+        </a:xfrm>
+      </p:grpSpPr>
+      <p:sp>
+        <p:nvSpPr>
+          <p:cNvPr id="2" name="テキスト プレースホルダー 1">
+            <a:extLst>
+              <a:ext uri="{FF2B5EF4-FFF2-40B4-BE49-F238E27FC236}">
+                <a16:creationId xmlns:a16="http://schemas.microsoft.com/office/drawing/2014/main" id="{807C6AD6-27CD-BC2D-013A-CD53A7A1A89E}"/>
+              </a:ext>
+            </a:extLst>
+          </p:cNvPr>
+          <p:cNvSpPr>
+            <a:spLocks noGrp="1"/>
+          </p:cNvSpPr>
+          <p:nvPr>
+            <p:ph type="body" sz="quarter" idx="10"/>
+          </p:nvPr>
+        </p:nvSpPr>
+        <p:spPr/>
+        <p:txBody>
+          <a:bodyPr/>
+          <a:lstStyle/>
+          <a:p>
+            <a:r>
+              <a:rPr kumimoji="1" lang="en-US" altLang="ja-JP" dirty="0"/>
+              <a:t>AI</a:t>
+            </a:r>
+            <a:r>
+              <a:rPr kumimoji="1" lang="ja-JP" altLang="en-US" dirty="0"/>
+              <a:t>の活用</a:t>
+            </a:r>
+          </a:p>
+        </p:txBody>
+      </p:sp>
+      <p:sp>
+        <p:nvSpPr>
+          <p:cNvPr id="3" name="テキスト ボックス 2">
+            <a:extLst>
+              <a:ext uri="{FF2B5EF4-FFF2-40B4-BE49-F238E27FC236}">
+                <a16:creationId xmlns:a16="http://schemas.microsoft.com/office/drawing/2014/main" id="{7CFE9C76-1493-5F10-A608-5AE3F2EE621D}"/>
+              </a:ext>
+            </a:extLst>
+          </p:cNvPr>
+          <p:cNvSpPr txBox="1"/>
+          <p:nvPr/>
+        </p:nvSpPr>
+        <p:spPr>
+          <a:xfrm>
+            <a:off x="-36512" y="980728"/>
+            <a:ext cx="3575018" cy="523220"/>
+          </a:xfrm>
+          <a:prstGeom prst="rect">
+            <a:avLst/>
+          </a:prstGeom>
+          <a:noFill/>
+        </p:spPr>
+        <p:txBody>
+          <a:bodyPr wrap="none" rtlCol="0">
+            <a:spAutoFit/>
+          </a:bodyPr>
+          <a:lstStyle/>
+          <a:p>
+            <a:r>
+              <a:rPr kumimoji="1" lang="ja-JP" altLang="en-US" sz="2800" dirty="0"/>
+              <a:t>「手間の移譲」は</a:t>
+            </a:r>
+            <a:r>
+              <a:rPr kumimoji="1" lang="en-US" altLang="ja-JP" sz="2800" dirty="0"/>
+              <a:t>OK</a:t>
+            </a:r>
+            <a:endParaRPr kumimoji="1" lang="ja-JP" altLang="en-US" sz="2800" dirty="0"/>
+          </a:p>
+        </p:txBody>
+      </p:sp>
+      <p:sp>
+        <p:nvSpPr>
+          <p:cNvPr id="4" name="テキスト ボックス 3">
+            <a:extLst>
+              <a:ext uri="{FF2B5EF4-FFF2-40B4-BE49-F238E27FC236}">
+                <a16:creationId xmlns:a16="http://schemas.microsoft.com/office/drawing/2014/main" id="{2AB97A68-B435-6089-D097-CC83D28B070F}"/>
+              </a:ext>
+            </a:extLst>
+          </p:cNvPr>
+          <p:cNvSpPr txBox="1"/>
+          <p:nvPr/>
+        </p:nvSpPr>
+        <p:spPr>
+          <a:xfrm>
+            <a:off x="611560" y="1556792"/>
+            <a:ext cx="4628190" cy="923330"/>
+          </a:xfrm>
+          <a:prstGeom prst="rect">
+            <a:avLst/>
+          </a:prstGeom>
+          <a:noFill/>
+        </p:spPr>
+        <p:txBody>
+          <a:bodyPr wrap="none" rtlCol="0">
+            <a:spAutoFit/>
+          </a:bodyPr>
+          <a:lstStyle/>
+          <a:p>
+            <a:pPr marL="285750" indent="-285750">
+              <a:buFont typeface="Arial" panose="020B0604020202020204" pitchFamily="34" charset="0"/>
+              <a:buChar char="•"/>
+            </a:pPr>
+            <a:r>
+              <a:rPr lang="ja-JP" altLang="en-US" dirty="0"/>
+              <a:t>教科書の画像から</a:t>
+            </a:r>
+            <a:r>
+              <a:rPr lang="en-US" altLang="ja-JP" dirty="0"/>
+              <a:t>LaTeX</a:t>
+            </a:r>
+            <a:r>
+              <a:rPr lang="ja-JP" altLang="en-US" dirty="0"/>
+              <a:t>数式を作らせる</a:t>
+            </a:r>
+            <a:endParaRPr lang="en-US" altLang="ja-JP" dirty="0"/>
+          </a:p>
+          <a:p>
+            <a:pPr marL="285750" indent="-285750">
+              <a:buFont typeface="Arial" panose="020B0604020202020204" pitchFamily="34" charset="0"/>
+              <a:buChar char="•"/>
+            </a:pPr>
+            <a:r>
+              <a:rPr kumimoji="1" lang="ja-JP" altLang="en-US" dirty="0"/>
+              <a:t>例や反例を提案させる</a:t>
+            </a:r>
+            <a:endParaRPr kumimoji="1" lang="en-US" altLang="ja-JP" dirty="0"/>
+          </a:p>
+          <a:p>
+            <a:pPr marL="285750" indent="-285750">
+              <a:buFont typeface="Arial" panose="020B0604020202020204" pitchFamily="34" charset="0"/>
+              <a:buChar char="•"/>
+            </a:pPr>
+            <a:r>
+              <a:rPr kumimoji="1" lang="ja-JP" altLang="en-US" dirty="0"/>
+              <a:t>図を作成させるためのコードを作らせる</a:t>
+            </a:r>
+          </a:p>
+        </p:txBody>
+      </p:sp>
+      <p:sp>
+        <p:nvSpPr>
+          <p:cNvPr id="5" name="テキスト ボックス 4">
+            <a:extLst>
+              <a:ext uri="{FF2B5EF4-FFF2-40B4-BE49-F238E27FC236}">
+                <a16:creationId xmlns:a16="http://schemas.microsoft.com/office/drawing/2014/main" id="{9548DC7F-936D-AAA5-C91C-36C441745673}"/>
+              </a:ext>
+            </a:extLst>
+          </p:cNvPr>
+          <p:cNvSpPr txBox="1"/>
+          <p:nvPr/>
+        </p:nvSpPr>
+        <p:spPr>
+          <a:xfrm>
+            <a:off x="-17607" y="4293096"/>
+            <a:ext cx="3595856" cy="523220"/>
+          </a:xfrm>
+          <a:prstGeom prst="rect">
+            <a:avLst/>
+          </a:prstGeom>
+          <a:noFill/>
+        </p:spPr>
+        <p:txBody>
+          <a:bodyPr wrap="none" rtlCol="0">
+            <a:spAutoFit/>
+          </a:bodyPr>
+          <a:lstStyle/>
+          <a:p>
+            <a:r>
+              <a:rPr kumimoji="1" lang="ja-JP" altLang="en-US" sz="2800" dirty="0"/>
+              <a:t>「責任の移譲」は</a:t>
+            </a:r>
+            <a:r>
+              <a:rPr lang="en-US" altLang="ja-JP" sz="2800" dirty="0"/>
+              <a:t>NG</a:t>
+            </a:r>
+            <a:endParaRPr kumimoji="1" lang="ja-JP" altLang="en-US" sz="2800" dirty="0"/>
+          </a:p>
+        </p:txBody>
+      </p:sp>
+      <p:sp>
+        <p:nvSpPr>
+          <p:cNvPr id="6" name="テキスト ボックス 5">
+            <a:extLst>
+              <a:ext uri="{FF2B5EF4-FFF2-40B4-BE49-F238E27FC236}">
+                <a16:creationId xmlns:a16="http://schemas.microsoft.com/office/drawing/2014/main" id="{EFB38F06-D7FB-3EDD-8AE7-B8E872207F47}"/>
+              </a:ext>
+            </a:extLst>
+          </p:cNvPr>
+          <p:cNvSpPr txBox="1"/>
+          <p:nvPr/>
+        </p:nvSpPr>
+        <p:spPr>
+          <a:xfrm>
+            <a:off x="611560" y="4869160"/>
+            <a:ext cx="4397358" cy="646331"/>
+          </a:xfrm>
+          <a:prstGeom prst="rect">
+            <a:avLst/>
+          </a:prstGeom>
+          <a:noFill/>
+        </p:spPr>
+        <p:txBody>
+          <a:bodyPr wrap="none" rtlCol="0">
+            <a:spAutoFit/>
+          </a:bodyPr>
+          <a:lstStyle/>
+          <a:p>
+            <a:pPr marL="285750" indent="-285750">
+              <a:buFont typeface="Arial" panose="020B0604020202020204" pitchFamily="34" charset="0"/>
+              <a:buChar char="•"/>
+            </a:pPr>
+            <a:r>
+              <a:rPr lang="ja-JP" altLang="en-US" dirty="0"/>
+              <a:t>教科書の写真からスライドを作らせる</a:t>
+            </a:r>
+            <a:endParaRPr lang="en-US" altLang="ja-JP" dirty="0"/>
+          </a:p>
+          <a:p>
+            <a:pPr marL="285750" indent="-285750">
+              <a:buFont typeface="Arial" panose="020B0604020202020204" pitchFamily="34" charset="0"/>
+              <a:buChar char="•"/>
+            </a:pPr>
+            <a:r>
+              <a:rPr kumimoji="1" lang="en-US" altLang="ja-JP" dirty="0"/>
+              <a:t>AI</a:t>
+            </a:r>
+            <a:r>
+              <a:rPr kumimoji="1" lang="ja-JP" altLang="en-US" dirty="0"/>
+              <a:t>が生成した説明をそのまま使う</a:t>
+            </a:r>
+          </a:p>
+        </p:txBody>
+      </p:sp>
+      <p:sp>
+        <p:nvSpPr>
+          <p:cNvPr id="7" name="テキスト ボックス 6">
+            <a:extLst>
+              <a:ext uri="{FF2B5EF4-FFF2-40B4-BE49-F238E27FC236}">
+                <a16:creationId xmlns:a16="http://schemas.microsoft.com/office/drawing/2014/main" id="{CBA3178F-35D3-5122-84B8-4E29DC6568FE}"/>
+              </a:ext>
+            </a:extLst>
+          </p:cNvPr>
+          <p:cNvSpPr txBox="1"/>
+          <p:nvPr/>
+        </p:nvSpPr>
+        <p:spPr>
+          <a:xfrm>
+            <a:off x="-36512" y="2636912"/>
+            <a:ext cx="4293163" cy="523220"/>
+          </a:xfrm>
+          <a:prstGeom prst="rect">
+            <a:avLst/>
+          </a:prstGeom>
+          <a:noFill/>
+        </p:spPr>
+        <p:txBody>
+          <a:bodyPr wrap="none" rtlCol="0">
+            <a:spAutoFit/>
+          </a:bodyPr>
+          <a:lstStyle/>
+          <a:p>
+            <a:r>
+              <a:rPr kumimoji="1" lang="ja-JP" altLang="en-US" sz="2800" dirty="0"/>
+              <a:t>「壁打ち」に使うのも</a:t>
+            </a:r>
+            <a:r>
+              <a:rPr kumimoji="1" lang="en-US" altLang="ja-JP" sz="2800" dirty="0"/>
+              <a:t>OK</a:t>
+            </a:r>
+            <a:endParaRPr kumimoji="1" lang="ja-JP" altLang="en-US" sz="2800" dirty="0"/>
+          </a:p>
+        </p:txBody>
+      </p:sp>
+      <p:sp>
+        <p:nvSpPr>
+          <p:cNvPr id="8" name="テキスト ボックス 7">
+            <a:extLst>
+              <a:ext uri="{FF2B5EF4-FFF2-40B4-BE49-F238E27FC236}">
+                <a16:creationId xmlns:a16="http://schemas.microsoft.com/office/drawing/2014/main" id="{A940041A-E0BF-5B32-C5F2-7F5292EE24A3}"/>
+              </a:ext>
+            </a:extLst>
+          </p:cNvPr>
+          <p:cNvSpPr txBox="1"/>
+          <p:nvPr/>
+        </p:nvSpPr>
+        <p:spPr>
+          <a:xfrm>
+            <a:off x="611560" y="3284984"/>
+            <a:ext cx="3704860" cy="923330"/>
+          </a:xfrm>
+          <a:prstGeom prst="rect">
+            <a:avLst/>
+          </a:prstGeom>
+          <a:noFill/>
+        </p:spPr>
+        <p:txBody>
+          <a:bodyPr wrap="none" rtlCol="0">
+            <a:spAutoFit/>
+          </a:bodyPr>
+          <a:lstStyle/>
+          <a:p>
+            <a:pPr marL="285750" indent="-285750">
+              <a:buFont typeface="Arial" panose="020B0604020202020204" pitchFamily="34" charset="0"/>
+              <a:buChar char="•"/>
+            </a:pPr>
+            <a:r>
+              <a:rPr lang="ja-JP" altLang="en-US" dirty="0"/>
+              <a:t>知らない単語について聞く</a:t>
+            </a:r>
+            <a:endParaRPr lang="en-US" altLang="ja-JP" dirty="0"/>
+          </a:p>
+          <a:p>
+            <a:pPr marL="285750" indent="-285750">
+              <a:buFont typeface="Arial" panose="020B0604020202020204" pitchFamily="34" charset="0"/>
+              <a:buChar char="•"/>
+            </a:pPr>
+            <a:r>
+              <a:rPr kumimoji="1" lang="ja-JP" altLang="en-US" dirty="0"/>
+              <a:t>関連する知識について聞く</a:t>
+            </a:r>
+            <a:endParaRPr kumimoji="1" lang="en-US" altLang="ja-JP" dirty="0"/>
+          </a:p>
+          <a:p>
+            <a:pPr marL="285750" indent="-285750">
+              <a:buFont typeface="Arial" panose="020B0604020202020204" pitchFamily="34" charset="0"/>
+              <a:buChar char="•"/>
+            </a:pPr>
+            <a:r>
+              <a:rPr lang="ja-JP" altLang="en-US" dirty="0"/>
+              <a:t>自分の理解が正確であるか聞く</a:t>
+            </a:r>
+            <a:endParaRPr kumimoji="1" lang="ja-JP" altLang="en-US" dirty="0"/>
+          </a:p>
+        </p:txBody>
+      </p:sp>
+      <p:sp>
+        <p:nvSpPr>
+          <p:cNvPr id="9" name="テキスト ボックス 8">
+            <a:extLst>
+              <a:ext uri="{FF2B5EF4-FFF2-40B4-BE49-F238E27FC236}">
+                <a16:creationId xmlns:a16="http://schemas.microsoft.com/office/drawing/2014/main" id="{B286EDC5-6AFD-0E99-E604-2A6F7E819E8E}"/>
+              </a:ext>
+            </a:extLst>
+          </p:cNvPr>
+          <p:cNvSpPr txBox="1"/>
+          <p:nvPr/>
+        </p:nvSpPr>
+        <p:spPr>
+          <a:xfrm>
+            <a:off x="683568" y="5805264"/>
+            <a:ext cx="7096815" cy="646331"/>
+          </a:xfrm>
+          <a:prstGeom prst="rect">
+            <a:avLst/>
+          </a:prstGeom>
+          <a:noFill/>
+        </p:spPr>
+        <p:txBody>
+          <a:bodyPr wrap="none" rtlCol="0">
+            <a:spAutoFit/>
+          </a:bodyPr>
+          <a:lstStyle/>
+          <a:p>
+            <a:r>
+              <a:rPr kumimoji="1" lang="en-US" altLang="ja-JP" dirty="0"/>
+              <a:t>AI</a:t>
+            </a:r>
+            <a:r>
+              <a:rPr kumimoji="1" lang="ja-JP" altLang="en-US" dirty="0"/>
+              <a:t>はぜひ活用</a:t>
+            </a:r>
+            <a:r>
+              <a:rPr lang="ja-JP" altLang="en-US" dirty="0"/>
+              <a:t>して欲しいが</a:t>
+            </a:r>
+            <a:r>
+              <a:rPr kumimoji="1" lang="ja-JP" altLang="en-US" dirty="0"/>
+              <a:t>、最後にはすべて自分で責任をとること</a:t>
+            </a:r>
+            <a:endParaRPr kumimoji="1" lang="en-US" altLang="ja-JP" dirty="0"/>
+          </a:p>
+          <a:p>
+            <a:r>
+              <a:rPr lang="ja-JP" altLang="en-US" dirty="0"/>
+              <a:t>自分で理解していない内容を使わない</a:t>
+            </a:r>
+            <a:endParaRPr kumimoji="1" lang="en-US" altLang="ja-JP" dirty="0"/>
+          </a:p>
+        </p:txBody>
+      </p:sp>
+    </p:spTree>
+    <p:extLst>
+      <p:ext uri="{BB962C8B-B14F-4D97-AF65-F5344CB8AC3E}">
+        <p14:creationId xmlns:p14="http://schemas.microsoft.com/office/powerpoint/2010/main" val="1329367518"/>
+      </p:ext>
+    </p:extLst>
+  </p:cSld>
+  <p:clrMapOvr>
+    <a:masterClrMapping/>
+  </p:clrMapOvr>
+</p:sld>
+</file>
+
+<file path=ppt/slides/slide14.xml><?xml version="1.0" encoding="utf-8"?>
 <p:sld xmlns:a="http://schemas.openxmlformats.org/drawingml/2006/main" xmlns:r="http://schemas.openxmlformats.org/officeDocument/2006/relationships" xmlns:p="http://schemas.openxmlformats.org/presentationml/2006/main">
   <p:cSld>
     <p:spTree>
